--- a/K社勉強会.pptx
+++ b/K社勉強会.pptx
@@ -121,6 +121,11 @@
       </a:defRPr>
     </a:lvl9pPr>
   </p:defaultTextStyle>
+  <p:extLst>
+    <p:ext uri="{EFAFB233-063F-42B5-8137-9DF3F51BA10A}">
+      <p15:sldGuideLst xmlns:p15="http://schemas.microsoft.com/office/powerpoint/2012/main"/>
+    </p:ext>
+  </p:extLst>
 </p:presentation>
 </file>
 
@@ -214,7 +219,7 @@
           <a:p>
             <a:fld id="{6E42E127-CA02-483F-83C3-8BD0B419FDC3}" type="datetimeFigureOut">
               <a:rPr kumimoji="1" lang="ja-JP" altLang="en-US" smtClean="0"/>
-              <a:t>2025/2/24</a:t>
+              <a:t>2025/3/4</a:t>
             </a:fld>
             <a:endParaRPr kumimoji="1" lang="ja-JP" altLang="en-US"/>
           </a:p>
@@ -756,7 +761,7 @@
           <a:p>
             <a:fld id="{FDA4B2E3-5E0B-443E-99F9-C72725D27F8E}" type="datetimeFigureOut">
               <a:rPr kumimoji="1" lang="ja-JP" altLang="en-US" smtClean="0"/>
-              <a:t>2025/2/24</a:t>
+              <a:t>2025/3/4</a:t>
             </a:fld>
             <a:endParaRPr kumimoji="1" lang="ja-JP" altLang="en-US"/>
           </a:p>
@@ -986,7 +991,7 @@
           <a:p>
             <a:fld id="{FDA4B2E3-5E0B-443E-99F9-C72725D27F8E}" type="datetimeFigureOut">
               <a:rPr kumimoji="1" lang="ja-JP" altLang="en-US" smtClean="0"/>
-              <a:t>2025/2/24</a:t>
+              <a:t>2025/3/4</a:t>
             </a:fld>
             <a:endParaRPr kumimoji="1" lang="ja-JP" altLang="en-US"/>
           </a:p>
@@ -1226,7 +1231,7 @@
           <a:p>
             <a:fld id="{FDA4B2E3-5E0B-443E-99F9-C72725D27F8E}" type="datetimeFigureOut">
               <a:rPr kumimoji="1" lang="ja-JP" altLang="en-US" smtClean="0"/>
-              <a:t>2025/2/24</a:t>
+              <a:t>2025/3/4</a:t>
             </a:fld>
             <a:endParaRPr kumimoji="1" lang="ja-JP" altLang="en-US"/>
           </a:p>
@@ -1516,7 +1521,7 @@
           <a:p>
             <a:fld id="{FDA4B2E3-5E0B-443E-99F9-C72725D27F8E}" type="datetimeFigureOut">
               <a:rPr kumimoji="1" lang="ja-JP" altLang="en-US" smtClean="0"/>
-              <a:t>2025/2/24</a:t>
+              <a:t>2025/3/4</a:t>
             </a:fld>
             <a:endParaRPr kumimoji="1" lang="ja-JP" altLang="en-US"/>
           </a:p>
@@ -1832,7 +1837,7 @@
           <a:p>
             <a:fld id="{FDA4B2E3-5E0B-443E-99F9-C72725D27F8E}" type="datetimeFigureOut">
               <a:rPr kumimoji="1" lang="ja-JP" altLang="en-US" smtClean="0"/>
-              <a:t>2025/2/24</a:t>
+              <a:t>2025/3/4</a:t>
             </a:fld>
             <a:endParaRPr kumimoji="1" lang="ja-JP" altLang="en-US"/>
           </a:p>
@@ -2161,7 +2166,7 @@
           <a:p>
             <a:fld id="{FDA4B2E3-5E0B-443E-99F9-C72725D27F8E}" type="datetimeFigureOut">
               <a:rPr kumimoji="1" lang="ja-JP" altLang="en-US" smtClean="0"/>
-              <a:t>2025/2/24</a:t>
+              <a:t>2025/3/4</a:t>
             </a:fld>
             <a:endParaRPr kumimoji="1" lang="ja-JP" altLang="en-US"/>
           </a:p>
@@ -2637,7 +2642,7 @@
           <a:p>
             <a:fld id="{FDA4B2E3-5E0B-443E-99F9-C72725D27F8E}" type="datetimeFigureOut">
               <a:rPr kumimoji="1" lang="ja-JP" altLang="en-US" smtClean="0"/>
-              <a:t>2025/2/24</a:t>
+              <a:t>2025/3/4</a:t>
             </a:fld>
             <a:endParaRPr kumimoji="1" lang="ja-JP" altLang="en-US"/>
           </a:p>
@@ -2778,7 +2783,7 @@
           <a:p>
             <a:fld id="{FDA4B2E3-5E0B-443E-99F9-C72725D27F8E}" type="datetimeFigureOut">
               <a:rPr kumimoji="1" lang="ja-JP" altLang="en-US" smtClean="0"/>
-              <a:t>2025/2/24</a:t>
+              <a:t>2025/3/4</a:t>
             </a:fld>
             <a:endParaRPr kumimoji="1" lang="ja-JP" altLang="en-US"/>
           </a:p>
@@ -2891,7 +2896,7 @@
           <a:p>
             <a:fld id="{FDA4B2E3-5E0B-443E-99F9-C72725D27F8E}" type="datetimeFigureOut">
               <a:rPr kumimoji="1" lang="ja-JP" altLang="en-US" smtClean="0"/>
-              <a:t>2025/2/24</a:t>
+              <a:t>2025/3/4</a:t>
             </a:fld>
             <a:endParaRPr kumimoji="1" lang="ja-JP" altLang="en-US"/>
           </a:p>
@@ -3234,7 +3239,7 @@
           <a:p>
             <a:fld id="{FDA4B2E3-5E0B-443E-99F9-C72725D27F8E}" type="datetimeFigureOut">
               <a:rPr kumimoji="1" lang="ja-JP" altLang="en-US" smtClean="0"/>
-              <a:t>2025/2/24</a:t>
+              <a:t>2025/3/4</a:t>
             </a:fld>
             <a:endParaRPr kumimoji="1" lang="ja-JP" altLang="en-US"/>
           </a:p>
@@ -3525,7 +3530,7 @@
           <a:p>
             <a:fld id="{FDA4B2E3-5E0B-443E-99F9-C72725D27F8E}" type="datetimeFigureOut">
               <a:rPr kumimoji="1" lang="ja-JP" altLang="en-US" smtClean="0"/>
-              <a:t>2025/2/24</a:t>
+              <a:t>2025/3/4</a:t>
             </a:fld>
             <a:endParaRPr kumimoji="1" lang="ja-JP" altLang="en-US"/>
           </a:p>
@@ -3798,7 +3803,7 @@
           <a:p>
             <a:fld id="{FDA4B2E3-5E0B-443E-99F9-C72725D27F8E}" type="datetimeFigureOut">
               <a:rPr kumimoji="1" lang="ja-JP" altLang="en-US" smtClean="0"/>
-              <a:t>2025/2/24</a:t>
+              <a:t>2025/3/4</a:t>
             </a:fld>
             <a:endParaRPr kumimoji="1" lang="ja-JP" altLang="en-US"/>
           </a:p>
@@ -6370,19 +6375,17 @@
       </p:sp>
       <p:pic>
         <p:nvPicPr>
-          <p:cNvPr id="5" name="コンテンツ プレースホルダー 4">
-            <a:extLst>
-              <a:ext uri="{FF2B5EF4-FFF2-40B4-BE49-F238E27FC236}">
-                <a16:creationId xmlns:a16="http://schemas.microsoft.com/office/drawing/2014/main" id="{30D447CA-81B1-63D4-B9C2-8C300F81A739}"/>
+          <p:cNvPr id="9" name="グラフィックス 8">
+            <a:extLst>
+              <a:ext uri="{FF2B5EF4-FFF2-40B4-BE49-F238E27FC236}">
+                <a16:creationId xmlns:a16="http://schemas.microsoft.com/office/drawing/2014/main" id="{36B33696-9A4A-D29E-E70F-62F51C4E43A1}"/>
               </a:ext>
             </a:extLst>
           </p:cNvPr>
           <p:cNvPicPr>
-            <a:picLocks noGrp="1" noChangeAspect="1"/>
+            <a:picLocks noChangeAspect="1"/>
           </p:cNvPicPr>
-          <p:nvPr>
-            <p:ph idx="1"/>
-          </p:nvPr>
+          <p:nvPr/>
         </p:nvPicPr>
         <p:blipFill>
           <a:blip r:embed="rId2">
@@ -6398,11 +6401,39 @@
         </p:blipFill>
         <p:spPr>
           <a:xfrm>
-            <a:off x="838200" y="2501321"/>
-            <a:ext cx="10515600" cy="2999945"/>
+            <a:off x="3097987" y="2674125"/>
+            <a:ext cx="6296025" cy="1809750"/>
           </a:xfrm>
+          <a:prstGeom prst="rect">
+            <a:avLst/>
+          </a:prstGeom>
         </p:spPr>
       </p:pic>
+      <p:sp>
+        <p:nvSpPr>
+          <p:cNvPr id="11" name="コンテンツ プレースホルダー 10">
+            <a:extLst>
+              <a:ext uri="{FF2B5EF4-FFF2-40B4-BE49-F238E27FC236}">
+                <a16:creationId xmlns:a16="http://schemas.microsoft.com/office/drawing/2014/main" id="{FF9FCCB0-325E-0DBD-B452-7A5A37A31E21}"/>
+              </a:ext>
+            </a:extLst>
+          </p:cNvPr>
+          <p:cNvSpPr>
+            <a:spLocks noGrp="1"/>
+          </p:cNvSpPr>
+          <p:nvPr>
+            <p:ph idx="1"/>
+          </p:nvPr>
+        </p:nvSpPr>
+        <p:spPr/>
+        <p:txBody>
+          <a:bodyPr/>
+          <a:lstStyle/>
+          <a:p>
+            <a:endParaRPr lang="ja-JP" altLang="en-US"/>
+          </a:p>
+        </p:txBody>
+      </p:sp>
     </p:spTree>
     <p:extLst>
       <p:ext uri="{BB962C8B-B14F-4D97-AF65-F5344CB8AC3E}">
@@ -6466,41 +6497,6 @@
           </a:p>
         </p:txBody>
       </p:sp>
-      <p:pic>
-        <p:nvPicPr>
-          <p:cNvPr id="5" name="コンテンツ プレースホルダー 4">
-            <a:extLst>
-              <a:ext uri="{FF2B5EF4-FFF2-40B4-BE49-F238E27FC236}">
-                <a16:creationId xmlns:a16="http://schemas.microsoft.com/office/drawing/2014/main" id="{FB6668B4-FE61-DFF4-D2D4-284317EDC282}"/>
-              </a:ext>
-            </a:extLst>
-          </p:cNvPr>
-          <p:cNvPicPr>
-            <a:picLocks noGrp="1" noChangeAspect="1"/>
-          </p:cNvPicPr>
-          <p:nvPr>
-            <p:ph idx="1"/>
-          </p:nvPr>
-        </p:nvPicPr>
-        <p:blipFill>
-          <a:blip r:embed="rId2">
-            <a:extLst>
-              <a:ext uri="{96DAC541-7B7A-43D3-8B79-37D633B846F1}">
-                <asvg:svgBlip xmlns:asvg="http://schemas.microsoft.com/office/drawing/2016/SVG/main" r:embed="rId3"/>
-              </a:ext>
-            </a:extLst>
-          </a:blip>
-          <a:stretch>
-            <a:fillRect/>
-          </a:stretch>
-        </p:blipFill>
-        <p:spPr>
-          <a:xfrm>
-            <a:off x="990601" y="1488274"/>
-            <a:ext cx="6059584" cy="4802989"/>
-          </a:xfrm>
-        </p:spPr>
-      </p:pic>
       <p:sp>
         <p:nvSpPr>
           <p:cNvPr id="6" name="テキスト ボックス 5">
@@ -6597,6 +6593,67 @@
           </a:p>
         </p:txBody>
       </p:sp>
+      <p:sp>
+        <p:nvSpPr>
+          <p:cNvPr id="4" name="コンテンツ プレースホルダー 3">
+            <a:extLst>
+              <a:ext uri="{FF2B5EF4-FFF2-40B4-BE49-F238E27FC236}">
+                <a16:creationId xmlns:a16="http://schemas.microsoft.com/office/drawing/2014/main" id="{D6E1C7AC-2135-D1A6-316A-B28226349776}"/>
+              </a:ext>
+            </a:extLst>
+          </p:cNvPr>
+          <p:cNvSpPr>
+            <a:spLocks noGrp="1"/>
+          </p:cNvSpPr>
+          <p:nvPr>
+            <p:ph idx="1"/>
+          </p:nvPr>
+        </p:nvSpPr>
+        <p:spPr/>
+        <p:txBody>
+          <a:bodyPr/>
+          <a:lstStyle/>
+          <a:p>
+            <a:endParaRPr lang="ja-JP" altLang="en-US" dirty="0"/>
+          </a:p>
+        </p:txBody>
+      </p:sp>
+      <p:pic>
+        <p:nvPicPr>
+          <p:cNvPr id="7" name="コンテンツ プレースホルダー 6">
+            <a:extLst>
+              <a:ext uri="{FF2B5EF4-FFF2-40B4-BE49-F238E27FC236}">
+                <a16:creationId xmlns:a16="http://schemas.microsoft.com/office/drawing/2014/main" id="{03432417-2646-0883-DF3B-E1F7827838E6}"/>
+              </a:ext>
+            </a:extLst>
+          </p:cNvPr>
+          <p:cNvPicPr>
+            <a:picLocks noChangeAspect="1"/>
+          </p:cNvPicPr>
+          <p:nvPr/>
+        </p:nvPicPr>
+        <p:blipFill>
+          <a:blip r:embed="rId2">
+            <a:extLst>
+              <a:ext uri="{96DAC541-7B7A-43D3-8B79-37D633B846F1}">
+                <asvg:svgBlip xmlns:asvg="http://schemas.microsoft.com/office/drawing/2016/SVG/main" r:embed="rId3"/>
+              </a:ext>
+            </a:extLst>
+          </a:blip>
+          <a:stretch>
+            <a:fillRect/>
+          </a:stretch>
+        </p:blipFill>
+        <p:spPr>
+          <a:xfrm>
+            <a:off x="2845656" y="1825625"/>
+            <a:ext cx="6500688" cy="4351338"/>
+          </a:xfrm>
+          <a:prstGeom prst="rect">
+            <a:avLst/>
+          </a:prstGeom>
+        </p:spPr>
+      </p:pic>
     </p:spTree>
     <p:extLst>
       <p:ext uri="{BB962C8B-B14F-4D97-AF65-F5344CB8AC3E}">

--- a/K社勉強会.pptx
+++ b/K社勉強会.pptx
@@ -6375,17 +6375,19 @@
       </p:sp>
       <p:pic>
         <p:nvPicPr>
-          <p:cNvPr id="9" name="グラフィックス 8">
-            <a:extLst>
-              <a:ext uri="{FF2B5EF4-FFF2-40B4-BE49-F238E27FC236}">
-                <a16:creationId xmlns:a16="http://schemas.microsoft.com/office/drawing/2014/main" id="{36B33696-9A4A-D29E-E70F-62F51C4E43A1}"/>
+          <p:cNvPr id="13" name="コンテンツ プレースホルダー 12">
+            <a:extLst>
+              <a:ext uri="{FF2B5EF4-FFF2-40B4-BE49-F238E27FC236}">
+                <a16:creationId xmlns:a16="http://schemas.microsoft.com/office/drawing/2014/main" id="{725D54CB-084B-6B73-CE60-955252A81A7C}"/>
               </a:ext>
             </a:extLst>
           </p:cNvPr>
           <p:cNvPicPr>
-            <a:picLocks noChangeAspect="1"/>
+            <a:picLocks noGrp="1" noChangeAspect="1"/>
           </p:cNvPicPr>
-          <p:nvPr/>
+          <p:nvPr>
+            <p:ph idx="1"/>
+          </p:nvPr>
         </p:nvPicPr>
         <p:blipFill>
           <a:blip r:embed="rId2">
@@ -6401,39 +6403,11 @@
         </p:blipFill>
         <p:spPr>
           <a:xfrm>
-            <a:off x="3097987" y="2674125"/>
-            <a:ext cx="6296025" cy="1809750"/>
+            <a:off x="2876550" y="2154310"/>
+            <a:ext cx="6438900" cy="1809750"/>
           </a:xfrm>
-          <a:prstGeom prst="rect">
-            <a:avLst/>
-          </a:prstGeom>
         </p:spPr>
       </p:pic>
-      <p:sp>
-        <p:nvSpPr>
-          <p:cNvPr id="11" name="コンテンツ プレースホルダー 10">
-            <a:extLst>
-              <a:ext uri="{FF2B5EF4-FFF2-40B4-BE49-F238E27FC236}">
-                <a16:creationId xmlns:a16="http://schemas.microsoft.com/office/drawing/2014/main" id="{FF9FCCB0-325E-0DBD-B452-7A5A37A31E21}"/>
-              </a:ext>
-            </a:extLst>
-          </p:cNvPr>
-          <p:cNvSpPr>
-            <a:spLocks noGrp="1"/>
-          </p:cNvSpPr>
-          <p:nvPr>
-            <p:ph idx="1"/>
-          </p:nvPr>
-        </p:nvSpPr>
-        <p:spPr/>
-        <p:txBody>
-          <a:bodyPr/>
-          <a:lstStyle/>
-          <a:p>
-            <a:endParaRPr lang="ja-JP" altLang="en-US"/>
-          </a:p>
-        </p:txBody>
-      </p:sp>
     </p:spTree>
     <p:extLst>
       <p:ext uri="{BB962C8B-B14F-4D97-AF65-F5344CB8AC3E}">

--- a/K社勉強会.pptx
+++ b/K社勉強会.pptx
@@ -6567,44 +6567,21 @@
           </a:p>
         </p:txBody>
       </p:sp>
-      <p:sp>
-        <p:nvSpPr>
-          <p:cNvPr id="4" name="コンテンツ プレースホルダー 3">
-            <a:extLst>
-              <a:ext uri="{FF2B5EF4-FFF2-40B4-BE49-F238E27FC236}">
-                <a16:creationId xmlns:a16="http://schemas.microsoft.com/office/drawing/2014/main" id="{D6E1C7AC-2135-D1A6-316A-B28226349776}"/>
-              </a:ext>
-            </a:extLst>
-          </p:cNvPr>
-          <p:cNvSpPr>
-            <a:spLocks noGrp="1"/>
-          </p:cNvSpPr>
-          <p:nvPr>
-            <p:ph idx="1"/>
-          </p:nvPr>
-        </p:nvSpPr>
-        <p:spPr/>
-        <p:txBody>
-          <a:bodyPr/>
-          <a:lstStyle/>
-          <a:p>
-            <a:endParaRPr lang="ja-JP" altLang="en-US" dirty="0"/>
-          </a:p>
-        </p:txBody>
-      </p:sp>
       <p:pic>
         <p:nvPicPr>
-          <p:cNvPr id="7" name="コンテンツ プレースホルダー 6">
-            <a:extLst>
-              <a:ext uri="{FF2B5EF4-FFF2-40B4-BE49-F238E27FC236}">
-                <a16:creationId xmlns:a16="http://schemas.microsoft.com/office/drawing/2014/main" id="{03432417-2646-0883-DF3B-E1F7827838E6}"/>
+          <p:cNvPr id="14" name="コンテンツ プレースホルダー 13">
+            <a:extLst>
+              <a:ext uri="{FF2B5EF4-FFF2-40B4-BE49-F238E27FC236}">
+                <a16:creationId xmlns:a16="http://schemas.microsoft.com/office/drawing/2014/main" id="{9448BDCD-0977-0E3E-5E21-B21C1577AF46}"/>
               </a:ext>
             </a:extLst>
           </p:cNvPr>
           <p:cNvPicPr>
-            <a:picLocks noChangeAspect="1"/>
+            <a:picLocks noGrp="1" noChangeAspect="1"/>
           </p:cNvPicPr>
-          <p:nvPr/>
+          <p:nvPr>
+            <p:ph idx="1"/>
+          </p:nvPr>
         </p:nvPicPr>
         <p:blipFill>
           <a:blip r:embed="rId2">
@@ -6620,12 +6597,9 @@
         </p:blipFill>
         <p:spPr>
           <a:xfrm>
-            <a:off x="2845656" y="1825625"/>
-            <a:ext cx="6500688" cy="4351338"/>
+            <a:off x="431678" y="1576243"/>
+            <a:ext cx="6544205" cy="4351338"/>
           </a:xfrm>
-          <a:prstGeom prst="rect">
-            <a:avLst/>
-          </a:prstGeom>
         </p:spPr>
       </p:pic>
     </p:spTree>
